--- a/git-ai-ppt/git-ai-research-record.pptx
+++ b/git-ai-ppt/git-ai-research-record.pptx
@@ -49,8 +49,8 @@
     <p:sldId id="288" r:id="rId40"/>
     <p:sldId id="302" r:id="rId41"/>
     <p:sldId id="303" r:id="rId42"/>
-    <p:sldId id="305" r:id="rId43"/>
-    <p:sldId id="306" r:id="rId44"/>
+    <p:sldId id="306" r:id="rId43"/>
+    <p:sldId id="305" r:id="rId44"/>
   </p:sldIdLst>
   <p:sldSz cx="12192000" cy="6858000"/>
   <p:notesSz cx="6858000" cy="9144000"/>
@@ -336,7 +336,7 @@
             </a:pPr>
             <a:fld id="{470563E6-95EB-4370-8635-C2BF33E7666D}" type="datetime1">
               <a:rPr lang="zh-CN" altLang="en-US"/>
-              <a:t>2026/9/6</a:t>
+              <a:t>2026/9/18</a:t>
             </a:fld>
             <a:endParaRPr lang="en-US" altLang="zh-CN"/>
           </a:p>
@@ -54558,221 +54558,6 @@
   <p:cSld>
     <p:spTree>
       <p:nvGrpSpPr>
-        <p:cNvPr id="1" name=""/>
-        <p:cNvGrpSpPr/>
-        <p:nvPr/>
-      </p:nvGrpSpPr>
-      <p:grpSpPr>
-        <a:xfrm>
-          <a:off x="0" y="0"/>
-          <a:ext cx="0" cy="0"/>
-          <a:chOff x="0" y="0"/>
-          <a:chExt cx="0" cy="0"/>
-        </a:xfrm>
-      </p:grpSpPr>
-      <p:sp>
-        <p:nvSpPr>
-          <p:cNvPr id="2" name="文本框 1">
-            <a:extLst>
-              <a:ext uri="{FF2B5EF4-FFF2-40B4-BE49-F238E27FC236}">
-                <a16:creationId xmlns:a16="http://schemas.microsoft.com/office/drawing/2014/main" id="{B8DCDDA1-FF98-3816-F224-E0CCCCBE057D}"/>
-              </a:ext>
-            </a:extLst>
-          </p:cNvPr>
-          <p:cNvSpPr txBox="1"/>
-          <p:nvPr/>
-        </p:nvSpPr>
-        <p:spPr>
-          <a:xfrm>
-            <a:off x="119336" y="1052736"/>
-            <a:ext cx="5477269" cy="1023742"/>
-          </a:xfrm>
-          <a:prstGeom prst="rect">
-            <a:avLst/>
-          </a:prstGeom>
-          <a:noFill/>
-        </p:spPr>
-        <p:txBody>
-          <a:bodyPr wrap="none" rtlCol="0">
-            <a:spAutoFit/>
-          </a:bodyPr>
-          <a:lstStyle/>
-          <a:p>
-            <a:pPr marL="342900" indent="-342900">
-              <a:lnSpc>
-                <a:spcPct val="150000"/>
-              </a:lnSpc>
-              <a:buAutoNum type="arabicPeriod"/>
-            </a:pPr>
-            <a:r>
-              <a:rPr kumimoji="1" lang="zh-CN" altLang="en-US" sz="1400" dirty="0"/>
-              <a:t>扩展了什么能力，比如 </a:t>
-            </a:r>
-            <a:r>
-              <a:rPr kumimoji="1" lang="en-US" altLang="zh-CN" sz="1400" dirty="0"/>
-              <a:t>token</a:t>
-            </a:r>
-            <a:r>
-              <a:rPr kumimoji="1" lang="zh-CN" altLang="en-US" sz="1400" dirty="0"/>
-              <a:t> 统计，这个前面的 </a:t>
-            </a:r>
-            <a:r>
-              <a:rPr kumimoji="1" lang="en-US" altLang="zh-CN" sz="1400" dirty="0"/>
-              <a:t>ppt</a:t>
-            </a:r>
-            <a:r>
-              <a:rPr kumimoji="1" lang="zh-CN" altLang="en-US" sz="1400" dirty="0"/>
-              <a:t> 都没写。</a:t>
-            </a:r>
-            <a:endParaRPr kumimoji="1" lang="en-US" altLang="zh-CN" sz="1400" dirty="0"/>
-          </a:p>
-          <a:p>
-            <a:pPr marL="342900" indent="-342900">
-              <a:lnSpc>
-                <a:spcPct val="150000"/>
-              </a:lnSpc>
-              <a:buAutoNum type="arabicPeriod"/>
-            </a:pPr>
-            <a:r>
-              <a:rPr kumimoji="1" lang="zh-CN" altLang="en-US" sz="1400" dirty="0"/>
-              <a:t>现在都支持了哪些 </a:t>
-            </a:r>
-            <a:r>
-              <a:rPr kumimoji="1" lang="en-US" altLang="zh-CN" sz="1400" dirty="0"/>
-              <a:t>coding</a:t>
-            </a:r>
-            <a:r>
-              <a:rPr kumimoji="1" lang="zh-CN" altLang="en-US" sz="1400" dirty="0"/>
-              <a:t> </a:t>
-            </a:r>
-            <a:r>
-              <a:rPr kumimoji="1" lang="en-US" altLang="zh-CN" sz="1400" dirty="0"/>
-              <a:t>agent</a:t>
-            </a:r>
-            <a:r>
-              <a:rPr kumimoji="1" lang="zh-CN" altLang="en-US" sz="1400" dirty="0"/>
-              <a:t>，可以用图标表示下。</a:t>
-            </a:r>
-            <a:endParaRPr kumimoji="1" lang="en-US" altLang="zh-CN" sz="1400" dirty="0"/>
-          </a:p>
-          <a:p>
-            <a:pPr marL="342900" indent="-342900">
-              <a:lnSpc>
-                <a:spcPct val="150000"/>
-              </a:lnSpc>
-              <a:buAutoNum type="arabicPeriod"/>
-            </a:pPr>
-            <a:r>
-              <a:rPr kumimoji="1" lang="zh-CN" altLang="en-US" sz="1400" dirty="0"/>
-              <a:t>做了很多事在后台兼容 </a:t>
-            </a:r>
-            <a:r>
-              <a:rPr kumimoji="1" lang="en-US" altLang="zh-CN" sz="1400" dirty="0"/>
-              <a:t>kilo</a:t>
-            </a:r>
-            <a:r>
-              <a:rPr kumimoji="1" lang="zh-CN" altLang="en-US" sz="1400" dirty="0"/>
-              <a:t> </a:t>
-            </a:r>
-            <a:r>
-              <a:rPr kumimoji="1" lang="en-US" altLang="zh-CN" sz="1400" dirty="0"/>
-              <a:t>v5</a:t>
-            </a:r>
-            <a:r>
-              <a:rPr kumimoji="1" lang="zh-CN" altLang="en-US" sz="1400" dirty="0"/>
-              <a:t> 和 </a:t>
-            </a:r>
-            <a:r>
-              <a:rPr kumimoji="1" lang="en-US" altLang="zh-CN" sz="1400" dirty="0"/>
-              <a:t>git</a:t>
-            </a:r>
-            <a:r>
-              <a:rPr kumimoji="1" lang="zh-CN" altLang="en-US" sz="1400" dirty="0"/>
-              <a:t> </a:t>
-            </a:r>
-            <a:r>
-              <a:rPr kumimoji="1" lang="en-US" altLang="zh-CN" sz="1400" dirty="0"/>
-              <a:t>ai</a:t>
-            </a:r>
-            <a:r>
-              <a:rPr kumimoji="1" lang="zh-CN" altLang="en-US" sz="1400" dirty="0"/>
-              <a:t>。</a:t>
-            </a:r>
-          </a:p>
-        </p:txBody>
-      </p:sp>
-      <p:sp>
-        <p:nvSpPr>
-          <p:cNvPr id="3" name="页面标题">
-            <a:extLst>
-              <a:ext uri="{FF2B5EF4-FFF2-40B4-BE49-F238E27FC236}">
-                <a16:creationId xmlns:a16="http://schemas.microsoft.com/office/drawing/2014/main" id="{F141C037-C655-8C75-4275-A099146D1839}"/>
-              </a:ext>
-            </a:extLst>
-          </p:cNvPr>
-          <p:cNvSpPr txBox="1"/>
-          <p:nvPr/>
-        </p:nvSpPr>
-        <p:spPr>
-          <a:xfrm>
-            <a:off x="338328" y="223468"/>
-            <a:ext cx="11521440" cy="430887"/>
-          </a:xfrm>
-          <a:prstGeom prst="rect">
-            <a:avLst/>
-          </a:prstGeom>
-          <a:noFill/>
-        </p:spPr>
-        <p:txBody>
-          <a:bodyPr wrap="square" lIns="0" tIns="0" rIns="0" bIns="0" anchor="ctr">
-            <a:spAutoFit/>
-          </a:bodyPr>
-          <a:lstStyle/>
-          <a:p>
-            <a:pPr algn="l">
-              <a:lnSpc>
-                <a:spcPct val="100000"/>
-              </a:lnSpc>
-              <a:spcAft>
-                <a:spcPts val="0"/>
-              </a:spcAft>
-            </a:pPr>
-            <a:r>
-              <a:rPr lang="zh-CN" altLang="en-US" sz="2800" b="1" dirty="0">
-                <a:solidFill>
-                  <a:srgbClr val="213261"/>
-                </a:solidFill>
-                <a:latin typeface="Microsoft YaHei"/>
-              </a:rPr>
-              <a:t>待补充</a:t>
-            </a:r>
-            <a:endParaRPr sz="2800" b="1" dirty="0">
-              <a:solidFill>
-                <a:srgbClr val="213261"/>
-              </a:solidFill>
-              <a:latin typeface="Microsoft YaHei"/>
-            </a:endParaRPr>
-          </a:p>
-        </p:txBody>
-      </p:sp>
-    </p:spTree>
-    <p:extLst>
-      <p:ext uri="{BB962C8B-B14F-4D97-AF65-F5344CB8AC3E}">
-        <p14:creationId xmlns:p14="http://schemas.microsoft.com/office/powerpoint/2010/main" val="917004519"/>
-      </p:ext>
-    </p:extLst>
-  </p:cSld>
-  <p:clrMapOvr>
-    <a:masterClrMapping/>
-  </p:clrMapOvr>
-</p:sld>
-</file>
-
-<file path=ppt/slides/slide42.xml><?xml version="1.0" encoding="utf-8"?>
-<p:sld xmlns:a="http://schemas.openxmlformats.org/drawingml/2006/main" xmlns:r="http://schemas.openxmlformats.org/officeDocument/2006/relationships" xmlns:p="http://schemas.openxmlformats.org/presentationml/2006/main">
-  <p:cSld>
-    <p:spTree>
-      <p:nvGrpSpPr>
         <p:cNvPr id="1" name="">
           <a:extLst>
             <a:ext uri="{FF2B5EF4-FFF2-40B4-BE49-F238E27FC236}">
@@ -54922,6 +54707,221 @@
     <p:extLst>
       <p:ext uri="{BB962C8B-B14F-4D97-AF65-F5344CB8AC3E}">
         <p14:creationId xmlns:p14="http://schemas.microsoft.com/office/powerpoint/2010/main" val="2707706790"/>
+      </p:ext>
+    </p:extLst>
+  </p:cSld>
+  <p:clrMapOvr>
+    <a:masterClrMapping/>
+  </p:clrMapOvr>
+</p:sld>
+</file>
+
+<file path=ppt/slides/slide42.xml><?xml version="1.0" encoding="utf-8"?>
+<p:sld xmlns:a="http://schemas.openxmlformats.org/drawingml/2006/main" xmlns:r="http://schemas.openxmlformats.org/officeDocument/2006/relationships" xmlns:p="http://schemas.openxmlformats.org/presentationml/2006/main">
+  <p:cSld>
+    <p:spTree>
+      <p:nvGrpSpPr>
+        <p:cNvPr id="1" name=""/>
+        <p:cNvGrpSpPr/>
+        <p:nvPr/>
+      </p:nvGrpSpPr>
+      <p:grpSpPr>
+        <a:xfrm>
+          <a:off x="0" y="0"/>
+          <a:ext cx="0" cy="0"/>
+          <a:chOff x="0" y="0"/>
+          <a:chExt cx="0" cy="0"/>
+        </a:xfrm>
+      </p:grpSpPr>
+      <p:sp>
+        <p:nvSpPr>
+          <p:cNvPr id="2" name="文本框 1">
+            <a:extLst>
+              <a:ext uri="{FF2B5EF4-FFF2-40B4-BE49-F238E27FC236}">
+                <a16:creationId xmlns:a16="http://schemas.microsoft.com/office/drawing/2014/main" id="{B8DCDDA1-FF98-3816-F224-E0CCCCBE057D}"/>
+              </a:ext>
+            </a:extLst>
+          </p:cNvPr>
+          <p:cNvSpPr txBox="1"/>
+          <p:nvPr/>
+        </p:nvSpPr>
+        <p:spPr>
+          <a:xfrm>
+            <a:off x="119336" y="1052736"/>
+            <a:ext cx="5477269" cy="1023742"/>
+          </a:xfrm>
+          <a:prstGeom prst="rect">
+            <a:avLst/>
+          </a:prstGeom>
+          <a:noFill/>
+        </p:spPr>
+        <p:txBody>
+          <a:bodyPr wrap="none" rtlCol="0">
+            <a:spAutoFit/>
+          </a:bodyPr>
+          <a:lstStyle/>
+          <a:p>
+            <a:pPr marL="342900" indent="-342900">
+              <a:lnSpc>
+                <a:spcPct val="150000"/>
+              </a:lnSpc>
+              <a:buAutoNum type="arabicPeriod"/>
+            </a:pPr>
+            <a:r>
+              <a:rPr kumimoji="1" lang="zh-CN" altLang="en-US" sz="1400" dirty="0"/>
+              <a:t>扩展了什么能力，比如 </a:t>
+            </a:r>
+            <a:r>
+              <a:rPr kumimoji="1" lang="en-US" altLang="zh-CN" sz="1400" dirty="0"/>
+              <a:t>token</a:t>
+            </a:r>
+            <a:r>
+              <a:rPr kumimoji="1" lang="zh-CN" altLang="en-US" sz="1400" dirty="0"/>
+              <a:t> 统计，这个前面的 </a:t>
+            </a:r>
+            <a:r>
+              <a:rPr kumimoji="1" lang="en-US" altLang="zh-CN" sz="1400" dirty="0"/>
+              <a:t>ppt</a:t>
+            </a:r>
+            <a:r>
+              <a:rPr kumimoji="1" lang="zh-CN" altLang="en-US" sz="1400" dirty="0"/>
+              <a:t> 都没写。</a:t>
+            </a:r>
+            <a:endParaRPr kumimoji="1" lang="en-US" altLang="zh-CN" sz="1400" dirty="0"/>
+          </a:p>
+          <a:p>
+            <a:pPr marL="342900" indent="-342900">
+              <a:lnSpc>
+                <a:spcPct val="150000"/>
+              </a:lnSpc>
+              <a:buAutoNum type="arabicPeriod"/>
+            </a:pPr>
+            <a:r>
+              <a:rPr kumimoji="1" lang="zh-CN" altLang="en-US" sz="1400" dirty="0"/>
+              <a:t>现在都支持了哪些 </a:t>
+            </a:r>
+            <a:r>
+              <a:rPr kumimoji="1" lang="en-US" altLang="zh-CN" sz="1400" dirty="0"/>
+              <a:t>coding</a:t>
+            </a:r>
+            <a:r>
+              <a:rPr kumimoji="1" lang="zh-CN" altLang="en-US" sz="1400" dirty="0"/>
+              <a:t> </a:t>
+            </a:r>
+            <a:r>
+              <a:rPr kumimoji="1" lang="en-US" altLang="zh-CN" sz="1400" dirty="0"/>
+              <a:t>agent</a:t>
+            </a:r>
+            <a:r>
+              <a:rPr kumimoji="1" lang="zh-CN" altLang="en-US" sz="1400" dirty="0"/>
+              <a:t>，可以用图标表示下。</a:t>
+            </a:r>
+            <a:endParaRPr kumimoji="1" lang="en-US" altLang="zh-CN" sz="1400" dirty="0"/>
+          </a:p>
+          <a:p>
+            <a:pPr marL="342900" indent="-342900">
+              <a:lnSpc>
+                <a:spcPct val="150000"/>
+              </a:lnSpc>
+              <a:buAutoNum type="arabicPeriod"/>
+            </a:pPr>
+            <a:r>
+              <a:rPr kumimoji="1" lang="zh-CN" altLang="en-US" sz="1400" dirty="0"/>
+              <a:t>做了很多事在后台兼容 </a:t>
+            </a:r>
+            <a:r>
+              <a:rPr kumimoji="1" lang="en-US" altLang="zh-CN" sz="1400" dirty="0"/>
+              <a:t>kilo</a:t>
+            </a:r>
+            <a:r>
+              <a:rPr kumimoji="1" lang="zh-CN" altLang="en-US" sz="1400" dirty="0"/>
+              <a:t> </a:t>
+            </a:r>
+            <a:r>
+              <a:rPr kumimoji="1" lang="en-US" altLang="zh-CN" sz="1400" dirty="0"/>
+              <a:t>v5</a:t>
+            </a:r>
+            <a:r>
+              <a:rPr kumimoji="1" lang="zh-CN" altLang="en-US" sz="1400" dirty="0"/>
+              <a:t> 和 </a:t>
+            </a:r>
+            <a:r>
+              <a:rPr kumimoji="1" lang="en-US" altLang="zh-CN" sz="1400" dirty="0"/>
+              <a:t>git</a:t>
+            </a:r>
+            <a:r>
+              <a:rPr kumimoji="1" lang="zh-CN" altLang="en-US" sz="1400" dirty="0"/>
+              <a:t> </a:t>
+            </a:r>
+            <a:r>
+              <a:rPr kumimoji="1" lang="en-US" altLang="zh-CN" sz="1400" dirty="0"/>
+              <a:t>ai</a:t>
+            </a:r>
+            <a:r>
+              <a:rPr kumimoji="1" lang="zh-CN" altLang="en-US" sz="1400" dirty="0"/>
+              <a:t>。</a:t>
+            </a:r>
+          </a:p>
+        </p:txBody>
+      </p:sp>
+      <p:sp>
+        <p:nvSpPr>
+          <p:cNvPr id="3" name="页面标题">
+            <a:extLst>
+              <a:ext uri="{FF2B5EF4-FFF2-40B4-BE49-F238E27FC236}">
+                <a16:creationId xmlns:a16="http://schemas.microsoft.com/office/drawing/2014/main" id="{F141C037-C655-8C75-4275-A099146D1839}"/>
+              </a:ext>
+            </a:extLst>
+          </p:cNvPr>
+          <p:cNvSpPr txBox="1"/>
+          <p:nvPr/>
+        </p:nvSpPr>
+        <p:spPr>
+          <a:xfrm>
+            <a:off x="338328" y="223468"/>
+            <a:ext cx="11521440" cy="430887"/>
+          </a:xfrm>
+          <a:prstGeom prst="rect">
+            <a:avLst/>
+          </a:prstGeom>
+          <a:noFill/>
+        </p:spPr>
+        <p:txBody>
+          <a:bodyPr wrap="square" lIns="0" tIns="0" rIns="0" bIns="0" anchor="ctr">
+            <a:spAutoFit/>
+          </a:bodyPr>
+          <a:lstStyle/>
+          <a:p>
+            <a:pPr algn="l">
+              <a:lnSpc>
+                <a:spcPct val="100000"/>
+              </a:lnSpc>
+              <a:spcAft>
+                <a:spcPts val="0"/>
+              </a:spcAft>
+            </a:pPr>
+            <a:r>
+              <a:rPr lang="zh-CN" altLang="en-US" sz="2800" b="1" dirty="0">
+                <a:solidFill>
+                  <a:srgbClr val="213261"/>
+                </a:solidFill>
+                <a:latin typeface="Microsoft YaHei"/>
+              </a:rPr>
+              <a:t>待补充</a:t>
+            </a:r>
+            <a:endParaRPr sz="2800" b="1" dirty="0">
+              <a:solidFill>
+                <a:srgbClr val="213261"/>
+              </a:solidFill>
+              <a:latin typeface="Microsoft YaHei"/>
+            </a:endParaRPr>
+          </a:p>
+        </p:txBody>
+      </p:sp>
+    </p:spTree>
+    <p:extLst>
+      <p:ext uri="{BB962C8B-B14F-4D97-AF65-F5344CB8AC3E}">
+        <p14:creationId xmlns:p14="http://schemas.microsoft.com/office/powerpoint/2010/main" val="917004519"/>
       </p:ext>
     </p:extLst>
   </p:cSld>
